--- a/outputs/longcycler_only_methods_summary/Longcycler_only_analysis_flowchart.pptx
+++ b/outputs/longcycler_only_methods_summary/Longcycler_only_analysis_flowchart.pptx
@@ -2,13 +2,13 @@
 <file path=ppt/presentation.xml><?xml version="1.0" encoding="utf-8"?>
 <p:presentation xmlns:p="http://schemas.openxmlformats.org/presentationml/2006/main">
   <p:sldMasterIdLst>
-    <p:sldMasterId xmlns:r="http://schemas.openxmlformats.org/officeDocument/2006/relationships" id="2147483648" r:id="R14bac9680e1f4563"/>
+    <p:sldMasterId xmlns:r="http://schemas.openxmlformats.org/officeDocument/2006/relationships" id="2147483648" r:id="R037b6bc511f94215"/>
   </p:sldMasterIdLst>
   <p:notesMasterIdLst>
-    <p:notesMasterId xmlns:r="http://schemas.openxmlformats.org/officeDocument/2006/relationships" r:id="Re66f4297f2654f6b"/>
+    <p:notesMasterId xmlns:r="http://schemas.openxmlformats.org/officeDocument/2006/relationships" r:id="R854f50353938416a"/>
   </p:notesMasterIdLst>
   <p:sldIdLst>
-    <p:sldId xmlns:r="http://schemas.openxmlformats.org/officeDocument/2006/relationships" id="256" r:id="R3a56a5d541284603"/>
+    <p:sldId xmlns:r="http://schemas.openxmlformats.org/officeDocument/2006/relationships" id="256" r:id="R25ff8321115c4cf2"/>
   </p:sldIdLst>
   <p:sldSz cx="12192000" cy="6858000"/>
   <p:notesSz cx="6858000" cy="9144000"/>
@@ -535,7 +535,11 @@
         <p:txBody>
           <a:bodyPr xmlns:a="http://schemas.openxmlformats.org/drawingml/2006/main"/>
           <a:lstStyle xmlns:a="http://schemas.openxmlformats.org/drawingml/2006/main"/>
-          <a:p xmlns:a="http://schemas.openxmlformats.org/drawingml/2006/main"/>
+          <a:p xmlns:a="http://schemas.openxmlformats.org/drawingml/2006/main">
+            <a:r>
+              <a:t>Read left to right. The 583-episode clinical source is shown only as labelled attrition/QC context. The selected manifest and clinical keys yield the 532-episode analytical cohort. Direct pair, VF, MLST and longitudinal outputs all remain inside that cohort.</a:t>
+            </a:r>
+          </a:p>
         </p:txBody>
       </p:sp>
       <p:sp>
@@ -601,7 +605,7 @@
   </p:cSld>
   <p:clrMap bg1="lt1" tx1="dk1" bg2="lt2" tx2="dk2" accent1="accent1" accent2="accent2" accent3="accent3" accent4="accent4" accent5="accent5" accent6="accent6" hlink="hlink" folHlink="folHlink"/>
   <p:sldLayoutIdLst>
-    <p:sldLayoutId xmlns:r="http://schemas.openxmlformats.org/officeDocument/2006/relationships" id="2147483649" r:id="R77ce8bcbda2e4521"/>
+    <p:sldLayoutId xmlns:r="http://schemas.openxmlformats.org/officeDocument/2006/relationships" id="2147483649" r:id="Re2417b27f8554168"/>
   </p:sldLayoutIdLst>
   <p:txStyles>
     <p:titleStyle>
@@ -1180,6 +1184,7 @@
           <a:lstStyle xmlns:a="http://schemas.openxmlformats.org/drawingml/2006/main"/>
           <a:p xmlns:a="http://schemas.openxmlformats.org/drawingml/2006/main">
             <a:pPr algn="l">
+              <a:buNone/>
               <a:defRPr sz="900" b="0">
                 <a:solidFill>
                   <a:srgbClr val="64748B"/>
@@ -1236,6 +1241,7 @@
           <a:lstStyle xmlns:a="http://schemas.openxmlformats.org/drawingml/2006/main"/>
           <a:p xmlns:a="http://schemas.openxmlformats.org/drawingml/2006/main">
             <a:pPr algn="l">
+              <a:buNone/>
               <a:defRPr sz="2625" b="1">
                 <a:solidFill>
                   <a:srgbClr val="111827"/>
@@ -1254,7 +1260,7 @@
                 <a:ea typeface="Aptos"/>
                 <a:cs typeface="Aptos"/>
               </a:rPr>
-              <a:t>How the results flow through the Longcycler-only analysis</a:t>
+              <a:t>One selected Longcycler cohort feeds every analytical result</a:t>
             </a:r>
           </a:p>
         </p:txBody>
@@ -1322,6 +1328,7 @@
           <a:lstStyle xmlns:a="http://schemas.openxmlformats.org/drawingml/2006/main"/>
           <a:p xmlns:a="http://schemas.openxmlformats.org/drawingml/2006/main">
             <a:pPr algn="l">
+              <a:buNone/>
               <a:defRPr sz="1125" b="0">
                 <a:solidFill>
                   <a:srgbClr val="475569"/>
@@ -1340,7 +1347,7 @@
                 <a:ea typeface="Aptos"/>
                 <a:cs typeface="Aptos"/>
               </a:rPr>
-              <a:t>Clinical and assembly inputs merge into the mixed canonical set; the primary defensible route then restricts to QC-passing Longcycler assemblies.</a:t>
+              <a:t>Clinical status and the selected assembly manifest meet by exact episode key before any genomic analysis.</a:t>
             </a:r>
           </a:p>
         </p:txBody>
@@ -1444,6 +1451,7 @@
           <a:lstStyle xmlns:a="http://schemas.openxmlformats.org/drawingml/2006/main"/>
           <a:p xmlns:a="http://schemas.openxmlformats.org/drawingml/2006/main">
             <a:pPr algn="l">
+              <a:buNone/>
               <a:defRPr sz="1125" b="1">
                 <a:solidFill>
                   <a:srgbClr val="111827"/>
@@ -1462,7 +1470,7 @@
                 <a:ea typeface="Aptos"/>
                 <a:cs typeface="Aptos"/>
               </a:rPr>
-              <a:t>Clinical status</a:t>
+              <a:t>Attrition/QC source</a:t>
             </a:r>
           </a:p>
         </p:txBody>
@@ -1500,6 +1508,7 @@
           <a:lstStyle xmlns:a="http://schemas.openxmlformats.org/drawingml/2006/main"/>
           <a:p xmlns:a="http://schemas.openxmlformats.org/drawingml/2006/main">
             <a:pPr algn="l">
+              <a:buNone/>
               <a:defRPr sz="1500" b="1">
                 <a:solidFill>
                   <a:srgbClr val="C2410C"/>
@@ -1556,6 +1565,7 @@
           <a:lstStyle xmlns:a="http://schemas.openxmlformats.org/drawingml/2006/main"/>
           <a:p xmlns:a="http://schemas.openxmlformats.org/drawingml/2006/main">
             <a:pPr algn="l">
+              <a:buNone/>
               <a:defRPr sz="900" b="0">
                 <a:solidFill>
                   <a:srgbClr val="475569"/>
@@ -1574,11 +1584,12 @@
                 <a:ea typeface="Aptos"/>
                 <a:cs typeface="Aptos"/>
               </a:rPr>
-              <a:t>166 participants</a:t>
+              <a:t>166 residents</a:t>
             </a:r>
           </a:p>
           <a:p xmlns:a="http://schemas.openxmlformats.org/drawingml/2006/main">
             <a:pPr algn="l">
+              <a:buNone/>
               <a:defRPr sz="900" b="0">
                 <a:solidFill>
                   <a:srgbClr val="475569"/>
@@ -1597,7 +1608,7 @@
                 <a:ea typeface="Aptos"/>
                 <a:cs typeface="Aptos"/>
               </a:rPr>
-              <a:t>18 UTI | 565 Not_UTI</a:t>
+              <a:t>18 UTI | 565 Not_UTI · context only</a:t>
             </a:r>
           </a:p>
         </p:txBody>
@@ -1701,6 +1712,7 @@
           <a:lstStyle xmlns:a="http://schemas.openxmlformats.org/drawingml/2006/main"/>
           <a:p xmlns:a="http://schemas.openxmlformats.org/drawingml/2006/main">
             <a:pPr algn="l">
+              <a:buNone/>
               <a:defRPr sz="1125" b="1">
                 <a:solidFill>
                   <a:srgbClr val="111827"/>
@@ -1719,7 +1731,7 @@
                 <a:ea typeface="Aptos"/>
                 <a:cs typeface="Aptos"/>
               </a:rPr>
-              <a:t>Assembly and QC</a:t>
+              <a:t>Selected assembly + QC</a:t>
             </a:r>
           </a:p>
         </p:txBody>
@@ -1757,6 +1769,7 @@
           <a:lstStyle xmlns:a="http://schemas.openxmlformats.org/drawingml/2006/main"/>
           <a:p xmlns:a="http://schemas.openxmlformats.org/drawingml/2006/main">
             <a:pPr algn="l">
+              <a:buNone/>
               <a:defRPr sz="1500" b="1">
                 <a:solidFill>
                   <a:srgbClr val="111827"/>
@@ -1775,7 +1788,7 @@
                 <a:ea typeface="Aptos"/>
                 <a:cs typeface="Aptos"/>
               </a:rPr>
-              <a:t>1,291 records</a:t>
+              <a:t>532 rows</a:t>
             </a:r>
           </a:p>
         </p:txBody>
@@ -1813,6 +1826,7 @@
           <a:lstStyle xmlns:a="http://schemas.openxmlformats.org/drawingml/2006/main"/>
           <a:p xmlns:a="http://schemas.openxmlformats.org/drawingml/2006/main">
             <a:pPr algn="l">
+              <a:buNone/>
               <a:defRPr sz="900" b="0">
                 <a:solidFill>
                   <a:srgbClr val="475569"/>
@@ -1831,11 +1845,12 @@
                 <a:ea typeface="Aptos"/>
                 <a:cs typeface="Aptos"/>
               </a:rPr>
-              <a:t>Longcycler/Flye alternatives</a:t>
+              <a:t>one selected QC-pass assembly per key</a:t>
             </a:r>
           </a:p>
           <a:p xmlns:a="http://schemas.openxmlformats.org/drawingml/2006/main">
             <a:pPr algn="l">
+              <a:buNone/>
               <a:defRPr sz="900" b="0">
                 <a:solidFill>
                   <a:srgbClr val="475569"/>
@@ -1854,7 +1869,7 @@
                 <a:ea typeface="Aptos"/>
                 <a:cs typeface="Aptos"/>
               </a:rPr>
-              <a:t>QC and canonical selection</a:t>
+              <a:t>FASTA content hashes verified</a:t>
             </a:r>
           </a:p>
         </p:txBody>
@@ -1958,6 +1973,7 @@
           <a:lstStyle xmlns:a="http://schemas.openxmlformats.org/drawingml/2006/main"/>
           <a:p xmlns:a="http://schemas.openxmlformats.org/drawingml/2006/main">
             <a:pPr algn="l">
+              <a:buNone/>
               <a:defRPr sz="1125" b="1">
                 <a:solidFill>
                   <a:srgbClr val="111827"/>
@@ -1976,7 +1992,7 @@
                 <a:ea typeface="Aptos"/>
                 <a:cs typeface="Aptos"/>
               </a:rPr>
-              <a:t>Mixed canonical context</a:t>
+              <a:t>Exact key-linked cohort</a:t>
             </a:r>
           </a:p>
         </p:txBody>
@@ -2014,6 +2030,7 @@
           <a:lstStyle xmlns:a="http://schemas.openxmlformats.org/drawingml/2006/main"/>
           <a:p xmlns:a="http://schemas.openxmlformats.org/drawingml/2006/main">
             <a:pPr algn="l">
+              <a:buNone/>
               <a:defRPr sz="1500" b="1">
                 <a:solidFill>
                   <a:srgbClr val="1D4ED8"/>
@@ -2032,7 +2049,7 @@
                 <a:ea typeface="Aptos"/>
                 <a:cs typeface="Aptos"/>
               </a:rPr>
-              <a:t>556 WGS/VF rows</a:t>
+              <a:t>532 analytical episodes</a:t>
             </a:r>
           </a:p>
         </p:txBody>
@@ -2070,6 +2087,7 @@
           <a:lstStyle xmlns:a="http://schemas.openxmlformats.org/drawingml/2006/main"/>
           <a:p xmlns:a="http://schemas.openxmlformats.org/drawingml/2006/main">
             <a:pPr algn="l">
+              <a:buNone/>
               <a:defRPr sz="900" b="0">
                 <a:solidFill>
                   <a:srgbClr val="475569"/>
@@ -2088,11 +2106,12 @@
                 <a:ea typeface="Aptos"/>
                 <a:cs typeface="Aptos"/>
               </a:rPr>
-              <a:t>162 participants</a:t>
+              <a:t>161 residents</a:t>
             </a:r>
           </a:p>
           <a:p xmlns:a="http://schemas.openxmlformats.org/drawingml/2006/main">
             <a:pPr algn="l">
+              <a:buNone/>
               <a:defRPr sz="900" b="0">
                 <a:solidFill>
                   <a:srgbClr val="475569"/>
@@ -2111,7 +2130,7 @@
                 <a:ea typeface="Aptos"/>
                 <a:cs typeface="Aptos"/>
               </a:rPr>
-              <a:t>Longcycler-preferred + 24 Flye fallback</a:t>
+              <a:t>manifest and clinical keys match exactly</a:t>
             </a:r>
           </a:p>
         </p:txBody>
@@ -2215,6 +2234,7 @@
           <a:lstStyle xmlns:a="http://schemas.openxmlformats.org/drawingml/2006/main"/>
           <a:p xmlns:a="http://schemas.openxmlformats.org/drawingml/2006/main">
             <a:pPr algn="l">
+              <a:buNone/>
               <a:defRPr sz="1125" b="1">
                 <a:solidFill>
                   <a:srgbClr val="111827"/>
@@ -2233,7 +2253,7 @@
                 <a:ea typeface="Aptos"/>
                 <a:cs typeface="Aptos"/>
               </a:rPr>
-              <a:t>Primary Longcycler denominator</a:t>
+              <a:t>Longcycler analytical cohort</a:t>
             </a:r>
           </a:p>
         </p:txBody>
@@ -2271,6 +2291,7 @@
           <a:lstStyle xmlns:a="http://schemas.openxmlformats.org/drawingml/2006/main"/>
           <a:p xmlns:a="http://schemas.openxmlformats.org/drawingml/2006/main">
             <a:pPr algn="l">
+              <a:buNone/>
               <a:defRPr sz="1350" b="1">
                 <a:solidFill>
                   <a:srgbClr val="047857"/>
@@ -2289,7 +2310,7 @@
                 <a:ea typeface="Aptos"/>
                 <a:cs typeface="Aptos"/>
               </a:rPr>
-              <a:t>532 rows | 161 participants</a:t>
+              <a:t>532 rows | 161 residents</a:t>
             </a:r>
           </a:p>
         </p:txBody>
@@ -2327,6 +2348,7 @@
           <a:lstStyle xmlns:a="http://schemas.openxmlformats.org/drawingml/2006/main"/>
           <a:p xmlns:a="http://schemas.openxmlformats.org/drawingml/2006/main">
             <a:pPr algn="l">
+              <a:buNone/>
               <a:defRPr sz="900" b="0">
                 <a:solidFill>
                   <a:srgbClr val="475569"/>
@@ -2350,6 +2372,7 @@
           </a:p>
           <a:p xmlns:a="http://schemas.openxmlformats.org/drawingml/2006/main">
             <a:pPr algn="l">
+              <a:buNone/>
               <a:defRPr sz="900" b="0">
                 <a:solidFill>
                   <a:srgbClr val="475569"/>
@@ -2368,7 +2391,7 @@
                 <a:ea typeface="Aptos"/>
                 <a:cs typeface="Aptos"/>
               </a:rPr>
-              <a:t>selected canonical QC-passing Longcycler</a:t>
+              <a:t>versioned operational phenotype</a:t>
             </a:r>
           </a:p>
         </p:txBody>
@@ -2472,6 +2495,7 @@
           <a:lstStyle xmlns:a="http://schemas.openxmlformats.org/drawingml/2006/main"/>
           <a:p xmlns:a="http://schemas.openxmlformats.org/drawingml/2006/main">
             <a:pPr algn="l">
+              <a:buNone/>
               <a:defRPr sz="1125" b="1">
                 <a:solidFill>
                   <a:srgbClr val="111827"/>
@@ -2528,6 +2552,7 @@
           <a:lstStyle xmlns:a="http://schemas.openxmlformats.org/drawingml/2006/main"/>
           <a:p xmlns:a="http://schemas.openxmlformats.org/drawingml/2006/main">
             <a:pPr algn="l">
+              <a:buNone/>
               <a:defRPr sz="1350" b="1">
                 <a:solidFill>
                   <a:srgbClr val="1D4ED8"/>
@@ -2546,7 +2571,7 @@
                 <a:ea typeface="Aptos"/>
                 <a:cs typeface="Aptos"/>
               </a:rPr>
-              <a:t>MLST 514 | 80 STs</a:t>
+              <a:t>893 direct pairs</a:t>
             </a:r>
           </a:p>
         </p:txBody>
@@ -2584,6 +2609,7 @@
           <a:lstStyle xmlns:a="http://schemas.openxmlformats.org/drawingml/2006/main"/>
           <a:p xmlns:a="http://schemas.openxmlformats.org/drawingml/2006/main">
             <a:pPr algn="l">
+              <a:buNone/>
               <a:defRPr sz="900" b="0">
                 <a:solidFill>
                   <a:srgbClr val="475569"/>
@@ -2602,11 +2628,12 @@
                 <a:ea typeface="Aptos"/>
                 <a:cs typeface="Aptos"/>
               </a:rPr>
-              <a:t>VF matrix: 227 genes</a:t>
+              <a:t>VF: 227 features · MLST: 493 typed</a:t>
             </a:r>
           </a:p>
           <a:p xmlns:a="http://schemas.openxmlformats.org/drawingml/2006/main">
             <a:pPr algn="l">
+              <a:buNone/>
               <a:defRPr sz="900" b="0">
                 <a:solidFill>
                   <a:srgbClr val="475569"/>
@@ -2625,7 +2652,7 @@
                 <a:ea typeface="Aptos"/>
                 <a:cs typeface="Aptos"/>
               </a:rPr>
-              <a:t>SNP context: ≤25 = strict same strain</a:t>
+              <a:t>all endpoints remain in the selected cohort</a:t>
             </a:r>
           </a:p>
         </p:txBody>
@@ -2729,6 +2756,7 @@
           <a:lstStyle xmlns:a="http://schemas.openxmlformats.org/drawingml/2006/main"/>
           <a:p xmlns:a="http://schemas.openxmlformats.org/drawingml/2006/main">
             <a:pPr algn="l">
+              <a:buNone/>
               <a:defRPr sz="1125" b="1">
                 <a:solidFill>
                   <a:srgbClr val="111827"/>
@@ -2785,6 +2813,7 @@
           <a:lstStyle xmlns:a="http://schemas.openxmlformats.org/drawingml/2006/main"/>
           <a:p xmlns:a="http://schemas.openxmlformats.org/drawingml/2006/main">
             <a:pPr algn="l">
+              <a:buNone/>
               <a:defRPr sz="1350" b="1">
                 <a:solidFill>
                   <a:srgbClr val="047857"/>
@@ -2841,6 +2870,7 @@
           <a:lstStyle xmlns:a="http://schemas.openxmlformats.org/drawingml/2006/main"/>
           <a:p xmlns:a="http://schemas.openxmlformats.org/drawingml/2006/main">
             <a:pPr algn="l">
+              <a:buNone/>
               <a:defRPr sz="900" b="0">
                 <a:solidFill>
                   <a:srgbClr val="475569"/>
@@ -2859,11 +2889,12 @@
                 <a:ea typeface="Aptos"/>
                 <a:cs typeface="Aptos"/>
               </a:rPr>
-              <a:t>139 participants</a:t>
+              <a:t>139 residents</a:t>
             </a:r>
           </a:p>
           <a:p xmlns:a="http://schemas.openxmlformats.org/drawingml/2006/main">
             <a:pPr algn="l">
+              <a:buNone/>
               <a:defRPr sz="900" b="0">
                 <a:solidFill>
                   <a:srgbClr val="475569"/>
@@ -2882,7 +2913,7 @@
                 <a:ea typeface="Aptos"/>
                 <a:cs typeface="Aptos"/>
               </a:rPr>
-              <a:t>rebuilt in pipeline time order</a:t>
+              <a:t>140 at ≤25 SNPs</a:t>
             </a:r>
           </a:p>
         </p:txBody>
@@ -2986,6 +3017,7 @@
           <a:lstStyle xmlns:a="http://schemas.openxmlformats.org/drawingml/2006/main"/>
           <a:p xmlns:a="http://schemas.openxmlformats.org/drawingml/2006/main">
             <a:pPr algn="l">
+              <a:buNone/>
               <a:defRPr sz="1125" b="1">
                 <a:solidFill>
                   <a:srgbClr val="111827"/>
@@ -3042,6 +3074,7 @@
           <a:lstStyle xmlns:a="http://schemas.openxmlformats.org/drawingml/2006/main"/>
           <a:p xmlns:a="http://schemas.openxmlformats.org/drawingml/2006/main">
             <a:pPr algn="l">
+              <a:buNone/>
               <a:defRPr sz="1275" b="1">
                 <a:solidFill>
                   <a:srgbClr val="047857"/>
@@ -3098,6 +3131,7 @@
           <a:lstStyle xmlns:a="http://schemas.openxmlformats.org/drawingml/2006/main"/>
           <a:p xmlns:a="http://schemas.openxmlformats.org/drawingml/2006/main">
             <a:pPr algn="l">
+              <a:buNone/>
               <a:defRPr sz="900" b="0">
                 <a:solidFill>
                   <a:srgbClr val="475569"/>
@@ -3116,11 +3150,12 @@
                 <a:ea typeface="Aptos"/>
                 <a:cs typeface="Aptos"/>
               </a:rPr>
-              <a:t>7 strict same-strain</a:t>
+              <a:t>5 at ≤25 SNPs</a:t>
             </a:r>
           </a:p>
           <a:p xmlns:a="http://schemas.openxmlformats.org/drawingml/2006/main">
             <a:pPr algn="l">
+              <a:buNone/>
               <a:defRPr sz="900" b="0">
                 <a:solidFill>
                   <a:srgbClr val="475569"/>
@@ -3139,14 +3174,14 @@
                 <a:ea typeface="Aptos"/>
                 <a:cs typeface="Aptos"/>
               </a:rPr>
-              <a:t>among 116 strict pairs</a:t>
+              <a:t>casebook 9/9 linked</a:t>
             </a:r>
           </a:p>
         </p:txBody>
       </p:sp>
       <p:cxnSp>
         <p:nvCxnSpPr>
-          <p:cNvPr id="89" name=""/>
+          <p:cNvPr id="719" name=""/>
           <p:cNvCxnSpPr>
             <a:stCxn xmlns:a="http://schemas.openxmlformats.org/drawingml/2006/main" id="5" idx="3"/>
             <a:endCxn xmlns:a="http://schemas.openxmlformats.org/drawingml/2006/main" id="15" idx="1"/>
@@ -3174,7 +3209,7 @@
       </p:cxnSp>
       <p:cxnSp>
         <p:nvCxnSpPr>
-          <p:cNvPr id="90" name=""/>
+          <p:cNvPr id="720" name=""/>
           <p:cNvCxnSpPr>
             <a:stCxn xmlns:a="http://schemas.openxmlformats.org/drawingml/2006/main" id="10" idx="3"/>
             <a:endCxn xmlns:a="http://schemas.openxmlformats.org/drawingml/2006/main" id="15" idx="1"/>
@@ -3202,7 +3237,7 @@
       </p:cxnSp>
       <p:cxnSp>
         <p:nvCxnSpPr>
-          <p:cNvPr id="91" name=""/>
+          <p:cNvPr id="721" name=""/>
           <p:cNvCxnSpPr>
             <a:stCxn xmlns:a="http://schemas.openxmlformats.org/drawingml/2006/main" id="15" idx="3"/>
             <a:endCxn xmlns:a="http://schemas.openxmlformats.org/drawingml/2006/main" id="20" idx="1"/>
@@ -3228,7 +3263,7 @@
       </p:cxnSp>
       <p:cxnSp>
         <p:nvCxnSpPr>
-          <p:cNvPr id="92" name=""/>
+          <p:cNvPr id="722" name=""/>
           <p:cNvCxnSpPr>
             <a:stCxn xmlns:a="http://schemas.openxmlformats.org/drawingml/2006/main" id="20" idx="2"/>
             <a:endCxn xmlns:a="http://schemas.openxmlformats.org/drawingml/2006/main" id="25" idx="0"/>
@@ -3257,7 +3292,7 @@
       </p:cxnSp>
       <p:cxnSp>
         <p:nvCxnSpPr>
-          <p:cNvPr id="93" name=""/>
+          <p:cNvPr id="723" name=""/>
           <p:cNvCxnSpPr>
             <a:stCxn xmlns:a="http://schemas.openxmlformats.org/drawingml/2006/main" id="25" idx="3"/>
             <a:endCxn xmlns:a="http://schemas.openxmlformats.org/drawingml/2006/main" id="30" idx="1"/>
@@ -3283,7 +3318,7 @@
       </p:cxnSp>
       <p:cxnSp>
         <p:nvCxnSpPr>
-          <p:cNvPr id="94" name=""/>
+          <p:cNvPr id="724" name=""/>
           <p:cNvCxnSpPr>
             <a:stCxn xmlns:a="http://schemas.openxmlformats.org/drawingml/2006/main" id="30" idx="3"/>
             <a:endCxn xmlns:a="http://schemas.openxmlformats.org/drawingml/2006/main" id="35" idx="1"/>
@@ -3340,6 +3375,7 @@
           <a:lstStyle xmlns:a="http://schemas.openxmlformats.org/drawingml/2006/main"/>
           <a:p xmlns:a="http://schemas.openxmlformats.org/drawingml/2006/main">
             <a:pPr algn="l">
+              <a:buNone/>
               <a:defRPr sz="900" b="0">
                 <a:solidFill>
                   <a:srgbClr val="475569"/>
@@ -3358,7 +3394,7 @@
                 <a:ea typeface="Aptos"/>
                 <a:cs typeface="Aptos"/>
               </a:rPr>
-              <a:t>Primary boundary: 24 Flye fallback rows are excluded from this route; antibiotic, wgMLST, demographic and causal claims are not recalculated here.</a:t>
+              <a:t>Boundary: the 583-episode source is attrition/QC context only; the phenotype is operational and all interpretation is exploratory, not causal.</a:t>
             </a:r>
           </a:p>
         </p:txBody>
@@ -3426,6 +3462,7 @@
           <a:lstStyle xmlns:a="http://schemas.openxmlformats.org/drawingml/2006/main"/>
           <a:p xmlns:a="http://schemas.openxmlformats.org/drawingml/2006/main">
             <a:pPr algn="l">
+              <a:buNone/>
               <a:defRPr sz="750" b="0">
                 <a:solidFill>
                   <a:srgbClr val="64748B"/>
@@ -3444,7 +3481,7 @@
                 <a:ea typeface="Aptos"/>
                 <a:cs typeface="Aptos"/>
               </a:rPr>
-              <a:t>Longcycler-only methods summary  |  supervisor discussion  |  9 July 2026</a:t>
+              <a:t>Longcycler-only methods summary  |  RQ01–RQ10  |  15 July 2026</a:t>
             </a:r>
           </a:p>
         </p:txBody>
@@ -3482,6 +3519,7 @@
           <a:lstStyle xmlns:a="http://schemas.openxmlformats.org/drawingml/2006/main"/>
           <a:p xmlns:a="http://schemas.openxmlformats.org/drawingml/2006/main">
             <a:pPr algn="r">
+              <a:buNone/>
               <a:defRPr sz="900" b="0">
                 <a:solidFill>
                   <a:srgbClr val="64748B"/>
